--- a/prezentacija/Prezentacija.pptx
+++ b/prezentacija/Prezentacija.pptx
@@ -5,7 +5,7 @@
     <p:sldMasterId id="2147483648" r:id="rId1"/>
   </p:sldMasterIdLst>
   <p:notesMasterIdLst>
-    <p:notesMasterId r:id="rId29"/>
+    <p:notesMasterId r:id="rId31"/>
   </p:notesMasterIdLst>
   <p:sldIdLst>
     <p:sldId id="256" r:id="rId2"/>
@@ -27,14 +27,16 @@
     <p:sldId id="280" r:id="rId18"/>
     <p:sldId id="278" r:id="rId19"/>
     <p:sldId id="281" r:id="rId20"/>
-    <p:sldId id="283" r:id="rId21"/>
-    <p:sldId id="265" r:id="rId22"/>
-    <p:sldId id="284" r:id="rId23"/>
-    <p:sldId id="266" r:id="rId24"/>
-    <p:sldId id="267" r:id="rId25"/>
-    <p:sldId id="285" r:id="rId26"/>
-    <p:sldId id="268" r:id="rId27"/>
-    <p:sldId id="270" r:id="rId28"/>
+    <p:sldId id="288" r:id="rId21"/>
+    <p:sldId id="289" r:id="rId22"/>
+    <p:sldId id="283" r:id="rId23"/>
+    <p:sldId id="265" r:id="rId24"/>
+    <p:sldId id="284" r:id="rId25"/>
+    <p:sldId id="266" r:id="rId26"/>
+    <p:sldId id="267" r:id="rId27"/>
+    <p:sldId id="285" r:id="rId28"/>
+    <p:sldId id="268" r:id="rId29"/>
+    <p:sldId id="270" r:id="rId30"/>
   </p:sldIdLst>
   <p:sldSz cx="12192000" cy="6858000"/>
   <p:notesSz cx="6858000" cy="12192000"/>
@@ -1471,7 +1473,7 @@
         <p:cNvPr id="1" name="">
           <a:extLst>
             <a:ext uri="{FF2B5EF4-FFF2-40B4-BE49-F238E27FC236}">
-              <a16:creationId xmlns:a16="http://schemas.microsoft.com/office/drawing/2014/main" id="{80042729-A9A9-9401-FAC8-CA5477B52185}"/>
+              <a16:creationId xmlns:a16="http://schemas.microsoft.com/office/drawing/2014/main" id="{9BA50023-ECAE-3B39-EA75-7A278FBA3B88}"/>
             </a:ext>
           </a:extLst>
         </p:cNvPr>
@@ -1491,7 +1493,7 @@
           <p:cNvPr id="2" name="Slide Image Placeholder 1">
             <a:extLst>
               <a:ext uri="{FF2B5EF4-FFF2-40B4-BE49-F238E27FC236}">
-                <a16:creationId xmlns:a16="http://schemas.microsoft.com/office/drawing/2014/main" id="{7EFF1083-C0A1-576F-3376-A8889663D8EF}"/>
+                <a16:creationId xmlns:a16="http://schemas.microsoft.com/office/drawing/2014/main" id="{2F8A60E8-932B-FCB1-45A7-EC07C81540EF}"/>
               </a:ext>
             </a:extLst>
           </p:cNvPr>
@@ -1509,7 +1511,7 @@
           <p:cNvPr id="3" name="Notes Placeholder 2">
             <a:extLst>
               <a:ext uri="{FF2B5EF4-FFF2-40B4-BE49-F238E27FC236}">
-                <a16:creationId xmlns:a16="http://schemas.microsoft.com/office/drawing/2014/main" id="{EECACACC-B286-870E-CE87-35907FC06D89}"/>
+                <a16:creationId xmlns:a16="http://schemas.microsoft.com/office/drawing/2014/main" id="{615532E1-11B5-349A-B36E-B04B128CEE6C}"/>
               </a:ext>
             </a:extLst>
           </p:cNvPr>
@@ -1534,7 +1536,7 @@
           <p:cNvPr id="4" name="Slide Number Placeholder 3">
             <a:extLst>
               <a:ext uri="{FF2B5EF4-FFF2-40B4-BE49-F238E27FC236}">
-                <a16:creationId xmlns:a16="http://schemas.microsoft.com/office/drawing/2014/main" id="{FD57B0E2-9EBD-2F5D-B13B-2D36955A4AFA}"/>
+                <a16:creationId xmlns:a16="http://schemas.microsoft.com/office/drawing/2014/main" id="{A69ADAE4-E13F-F390-6D9F-18A5B2C1EB3E}"/>
               </a:ext>
             </a:extLst>
           </p:cNvPr>
@@ -1561,7 +1563,7 @@
     </p:spTree>
     <p:extLst>
       <p:ext uri="{BB962C8B-B14F-4D97-AF65-F5344CB8AC3E}">
-        <p14:creationId xmlns:p14="http://schemas.microsoft.com/office/powerpoint/2010/main" val="731777186"/>
+        <p14:creationId xmlns:p14="http://schemas.microsoft.com/office/powerpoint/2010/main" val="207057624"/>
       </p:ext>
     </p:extLst>
   </p:cSld>
@@ -1576,7 +1578,13 @@
   <p:cSld>
     <p:spTree>
       <p:nvGrpSpPr>
-        <p:cNvPr id="1" name=""/>
+        <p:cNvPr id="1" name="">
+          <a:extLst>
+            <a:ext uri="{FF2B5EF4-FFF2-40B4-BE49-F238E27FC236}">
+              <a16:creationId xmlns:a16="http://schemas.microsoft.com/office/drawing/2014/main" id="{F596EF00-8DC8-9D55-E0BA-A4F0DCE1845A}"/>
+            </a:ext>
+          </a:extLst>
+        </p:cNvPr>
         <p:cNvGrpSpPr/>
         <p:nvPr/>
       </p:nvGrpSpPr>
@@ -1590,7 +1598,13 @@
       </p:grpSpPr>
       <p:sp>
         <p:nvSpPr>
-          <p:cNvPr id="2" name="Slide Image Placeholder 1"/>
+          <p:cNvPr id="2" name="Slide Image Placeholder 1">
+            <a:extLst>
+              <a:ext uri="{FF2B5EF4-FFF2-40B4-BE49-F238E27FC236}">
+                <a16:creationId xmlns:a16="http://schemas.microsoft.com/office/drawing/2014/main" id="{529EBF0B-B35A-D58C-5439-2BB6C14A2EE3}"/>
+              </a:ext>
+            </a:extLst>
+          </p:cNvPr>
           <p:cNvSpPr>
             <a:spLocks noGrp="1" noRot="1" noChangeAspect="1"/>
           </p:cNvSpPr>
@@ -1602,7 +1616,13 @@
       </p:sp>
       <p:sp>
         <p:nvSpPr>
-          <p:cNvPr id="3" name="Notes Placeholder 2"/>
+          <p:cNvPr id="3" name="Notes Placeholder 2">
+            <a:extLst>
+              <a:ext uri="{FF2B5EF4-FFF2-40B4-BE49-F238E27FC236}">
+                <a16:creationId xmlns:a16="http://schemas.microsoft.com/office/drawing/2014/main" id="{ABBBD120-CC1D-A048-90B9-2160D0F0F957}"/>
+              </a:ext>
+            </a:extLst>
+          </p:cNvPr>
           <p:cNvSpPr>
             <a:spLocks noGrp="1"/>
           </p:cNvSpPr>
@@ -1621,7 +1641,13 @@
       </p:sp>
       <p:sp>
         <p:nvSpPr>
-          <p:cNvPr id="4" name="Slide Number Placeholder 3"/>
+          <p:cNvPr id="4" name="Slide Number Placeholder 3">
+            <a:extLst>
+              <a:ext uri="{FF2B5EF4-FFF2-40B4-BE49-F238E27FC236}">
+                <a16:creationId xmlns:a16="http://schemas.microsoft.com/office/drawing/2014/main" id="{421B271C-503B-833D-1082-A5CCDC3C18F5}"/>
+              </a:ext>
+            </a:extLst>
+          </p:cNvPr>
           <p:cNvSpPr>
             <a:spLocks noGrp="1"/>
           </p:cNvSpPr>
@@ -1645,7 +1671,7 @@
     </p:spTree>
     <p:extLst>
       <p:ext uri="{BB962C8B-B14F-4D97-AF65-F5344CB8AC3E}">
-        <p14:creationId xmlns:p14="http://schemas.microsoft.com/office/powerpoint/2010/main" val="1024086991"/>
+        <p14:creationId xmlns:p14="http://schemas.microsoft.com/office/powerpoint/2010/main" val="612847530"/>
       </p:ext>
     </p:extLst>
   </p:cSld>
@@ -1663,7 +1689,7 @@
         <p:cNvPr id="1" name="">
           <a:extLst>
             <a:ext uri="{FF2B5EF4-FFF2-40B4-BE49-F238E27FC236}">
-              <a16:creationId xmlns:a16="http://schemas.microsoft.com/office/drawing/2014/main" id="{F427D60B-0D69-173C-9788-60434D0EB6AC}"/>
+              <a16:creationId xmlns:a16="http://schemas.microsoft.com/office/drawing/2014/main" id="{80042729-A9A9-9401-FAC8-CA5477B52185}"/>
             </a:ext>
           </a:extLst>
         </p:cNvPr>
@@ -1683,7 +1709,7 @@
           <p:cNvPr id="2" name="Slide Image Placeholder 1">
             <a:extLst>
               <a:ext uri="{FF2B5EF4-FFF2-40B4-BE49-F238E27FC236}">
-                <a16:creationId xmlns:a16="http://schemas.microsoft.com/office/drawing/2014/main" id="{B5DDCE38-3B57-CD76-5E6A-B3BE155CB0D0}"/>
+                <a16:creationId xmlns:a16="http://schemas.microsoft.com/office/drawing/2014/main" id="{7EFF1083-C0A1-576F-3376-A8889663D8EF}"/>
               </a:ext>
             </a:extLst>
           </p:cNvPr>
@@ -1701,7 +1727,7 @@
           <p:cNvPr id="3" name="Notes Placeholder 2">
             <a:extLst>
               <a:ext uri="{FF2B5EF4-FFF2-40B4-BE49-F238E27FC236}">
-                <a16:creationId xmlns:a16="http://schemas.microsoft.com/office/drawing/2014/main" id="{48728C19-61B7-16C4-6B6A-35140EC740D7}"/>
+                <a16:creationId xmlns:a16="http://schemas.microsoft.com/office/drawing/2014/main" id="{EECACACC-B286-870E-CE87-35907FC06D89}"/>
               </a:ext>
             </a:extLst>
           </p:cNvPr>
@@ -1726,7 +1752,7 @@
           <p:cNvPr id="4" name="Slide Number Placeholder 3">
             <a:extLst>
               <a:ext uri="{FF2B5EF4-FFF2-40B4-BE49-F238E27FC236}">
-                <a16:creationId xmlns:a16="http://schemas.microsoft.com/office/drawing/2014/main" id="{6A7FCD06-3EF6-FAE7-DDEF-F9BCBAA6A277}"/>
+                <a16:creationId xmlns:a16="http://schemas.microsoft.com/office/drawing/2014/main" id="{FD57B0E2-9EBD-2F5D-B13B-2D36955A4AFA}"/>
               </a:ext>
             </a:extLst>
           </p:cNvPr>
@@ -1753,7 +1779,7 @@
     </p:spTree>
     <p:extLst>
       <p:ext uri="{BB962C8B-B14F-4D97-AF65-F5344CB8AC3E}">
-        <p14:creationId xmlns:p14="http://schemas.microsoft.com/office/powerpoint/2010/main" val="371734702"/>
+        <p14:creationId xmlns:p14="http://schemas.microsoft.com/office/powerpoint/2010/main" val="731777186"/>
       </p:ext>
     </p:extLst>
   </p:cSld>
@@ -1852,7 +1878,13 @@
   <p:cSld>
     <p:spTree>
       <p:nvGrpSpPr>
-        <p:cNvPr id="1" name=""/>
+        <p:cNvPr id="1" name="">
+          <a:extLst>
+            <a:ext uri="{FF2B5EF4-FFF2-40B4-BE49-F238E27FC236}">
+              <a16:creationId xmlns:a16="http://schemas.microsoft.com/office/drawing/2014/main" id="{F427D60B-0D69-173C-9788-60434D0EB6AC}"/>
+            </a:ext>
+          </a:extLst>
+        </p:cNvPr>
         <p:cNvGrpSpPr/>
         <p:nvPr/>
       </p:nvGrpSpPr>
@@ -1866,7 +1898,13 @@
       </p:grpSpPr>
       <p:sp>
         <p:nvSpPr>
-          <p:cNvPr id="2" name="Slide Image Placeholder 1"/>
+          <p:cNvPr id="2" name="Slide Image Placeholder 1">
+            <a:extLst>
+              <a:ext uri="{FF2B5EF4-FFF2-40B4-BE49-F238E27FC236}">
+                <a16:creationId xmlns:a16="http://schemas.microsoft.com/office/drawing/2014/main" id="{B5DDCE38-3B57-CD76-5E6A-B3BE155CB0D0}"/>
+              </a:ext>
+            </a:extLst>
+          </p:cNvPr>
           <p:cNvSpPr>
             <a:spLocks noGrp="1" noRot="1" noChangeAspect="1"/>
           </p:cNvSpPr>
@@ -1878,7 +1916,13 @@
       </p:sp>
       <p:sp>
         <p:nvSpPr>
-          <p:cNvPr id="3" name="Notes Placeholder 2"/>
+          <p:cNvPr id="3" name="Notes Placeholder 2">
+            <a:extLst>
+              <a:ext uri="{FF2B5EF4-FFF2-40B4-BE49-F238E27FC236}">
+                <a16:creationId xmlns:a16="http://schemas.microsoft.com/office/drawing/2014/main" id="{48728C19-61B7-16C4-6B6A-35140EC740D7}"/>
+              </a:ext>
+            </a:extLst>
+          </p:cNvPr>
           <p:cNvSpPr>
             <a:spLocks noGrp="1"/>
           </p:cNvSpPr>
@@ -1897,7 +1941,13 @@
       </p:sp>
       <p:sp>
         <p:nvSpPr>
-          <p:cNvPr id="4" name="Slide Number Placeholder 3"/>
+          <p:cNvPr id="4" name="Slide Number Placeholder 3">
+            <a:extLst>
+              <a:ext uri="{FF2B5EF4-FFF2-40B4-BE49-F238E27FC236}">
+                <a16:creationId xmlns:a16="http://schemas.microsoft.com/office/drawing/2014/main" id="{6A7FCD06-3EF6-FAE7-DDEF-F9BCBAA6A277}"/>
+              </a:ext>
+            </a:extLst>
+          </p:cNvPr>
           <p:cNvSpPr>
             <a:spLocks noGrp="1"/>
           </p:cNvSpPr>
@@ -1921,7 +1971,7 @@
     </p:spTree>
     <p:extLst>
       <p:ext uri="{BB962C8B-B14F-4D97-AF65-F5344CB8AC3E}">
-        <p14:creationId xmlns:p14="http://schemas.microsoft.com/office/powerpoint/2010/main" val="1024086991"/>
+        <p14:creationId xmlns:p14="http://schemas.microsoft.com/office/powerpoint/2010/main" val="371734702"/>
       </p:ext>
     </p:extLst>
   </p:cSld>
@@ -1936,13 +1986,7 @@
   <p:cSld>
     <p:spTree>
       <p:nvGrpSpPr>
-        <p:cNvPr id="1" name="">
-          <a:extLst>
-            <a:ext uri="{FF2B5EF4-FFF2-40B4-BE49-F238E27FC236}">
-              <a16:creationId xmlns:a16="http://schemas.microsoft.com/office/drawing/2014/main" id="{E561D75E-6BFF-DEFE-3962-D43939088793}"/>
-            </a:ext>
-          </a:extLst>
-        </p:cNvPr>
+        <p:cNvPr id="1" name=""/>
         <p:cNvGrpSpPr/>
         <p:nvPr/>
       </p:nvGrpSpPr>
@@ -1956,13 +2000,7 @@
       </p:grpSpPr>
       <p:sp>
         <p:nvSpPr>
-          <p:cNvPr id="2" name="Slide Image Placeholder 1">
-            <a:extLst>
-              <a:ext uri="{FF2B5EF4-FFF2-40B4-BE49-F238E27FC236}">
-                <a16:creationId xmlns:a16="http://schemas.microsoft.com/office/drawing/2014/main" id="{9D85F21E-4B63-3E2B-B5CF-4560E14913AD}"/>
-              </a:ext>
-            </a:extLst>
-          </p:cNvPr>
+          <p:cNvPr id="2" name="Slide Image Placeholder 1"/>
           <p:cNvSpPr>
             <a:spLocks noGrp="1" noRot="1" noChangeAspect="1"/>
           </p:cNvSpPr>
@@ -1974,13 +2012,7 @@
       </p:sp>
       <p:sp>
         <p:nvSpPr>
-          <p:cNvPr id="3" name="Notes Placeholder 2">
-            <a:extLst>
-              <a:ext uri="{FF2B5EF4-FFF2-40B4-BE49-F238E27FC236}">
-                <a16:creationId xmlns:a16="http://schemas.microsoft.com/office/drawing/2014/main" id="{6BA64A14-1527-05A6-534C-7D00A1C1FC3D}"/>
-              </a:ext>
-            </a:extLst>
-          </p:cNvPr>
+          <p:cNvPr id="3" name="Notes Placeholder 2"/>
           <p:cNvSpPr>
             <a:spLocks noGrp="1"/>
           </p:cNvSpPr>
@@ -1999,13 +2031,7 @@
       </p:sp>
       <p:sp>
         <p:nvSpPr>
-          <p:cNvPr id="4" name="Slide Number Placeholder 3">
-            <a:extLst>
-              <a:ext uri="{FF2B5EF4-FFF2-40B4-BE49-F238E27FC236}">
-                <a16:creationId xmlns:a16="http://schemas.microsoft.com/office/drawing/2014/main" id="{17DDD107-AD47-8AEE-D68E-C5B47AFF071D}"/>
-              </a:ext>
-            </a:extLst>
-          </p:cNvPr>
+          <p:cNvPr id="4" name="Slide Number Placeholder 3"/>
           <p:cNvSpPr>
             <a:spLocks noGrp="1"/>
           </p:cNvSpPr>
@@ -2029,7 +2055,7 @@
     </p:spTree>
     <p:extLst>
       <p:ext uri="{BB962C8B-B14F-4D97-AF65-F5344CB8AC3E}">
-        <p14:creationId xmlns:p14="http://schemas.microsoft.com/office/powerpoint/2010/main" val="3088361052"/>
+        <p14:creationId xmlns:p14="http://schemas.microsoft.com/office/powerpoint/2010/main" val="1024086991"/>
       </p:ext>
     </p:extLst>
   </p:cSld>
@@ -2128,6 +2154,114 @@
   <p:cSld>
     <p:spTree>
       <p:nvGrpSpPr>
+        <p:cNvPr id="1" name="">
+          <a:extLst>
+            <a:ext uri="{FF2B5EF4-FFF2-40B4-BE49-F238E27FC236}">
+              <a16:creationId xmlns:a16="http://schemas.microsoft.com/office/drawing/2014/main" id="{E561D75E-6BFF-DEFE-3962-D43939088793}"/>
+            </a:ext>
+          </a:extLst>
+        </p:cNvPr>
+        <p:cNvGrpSpPr/>
+        <p:nvPr/>
+      </p:nvGrpSpPr>
+      <p:grpSpPr>
+        <a:xfrm>
+          <a:off x="0" y="0"/>
+          <a:ext cx="0" cy="0"/>
+          <a:chOff x="0" y="0"/>
+          <a:chExt cx="0" cy="0"/>
+        </a:xfrm>
+      </p:grpSpPr>
+      <p:sp>
+        <p:nvSpPr>
+          <p:cNvPr id="2" name="Slide Image Placeholder 1">
+            <a:extLst>
+              <a:ext uri="{FF2B5EF4-FFF2-40B4-BE49-F238E27FC236}">
+                <a16:creationId xmlns:a16="http://schemas.microsoft.com/office/drawing/2014/main" id="{9D85F21E-4B63-3E2B-B5CF-4560E14913AD}"/>
+              </a:ext>
+            </a:extLst>
+          </p:cNvPr>
+          <p:cNvSpPr>
+            <a:spLocks noGrp="1" noRot="1" noChangeAspect="1"/>
+          </p:cNvSpPr>
+          <p:nvPr>
+            <p:ph type="sldImg"/>
+          </p:nvPr>
+        </p:nvSpPr>
+        <p:spPr/>
+      </p:sp>
+      <p:sp>
+        <p:nvSpPr>
+          <p:cNvPr id="3" name="Notes Placeholder 2">
+            <a:extLst>
+              <a:ext uri="{FF2B5EF4-FFF2-40B4-BE49-F238E27FC236}">
+                <a16:creationId xmlns:a16="http://schemas.microsoft.com/office/drawing/2014/main" id="{6BA64A14-1527-05A6-534C-7D00A1C1FC3D}"/>
+              </a:ext>
+            </a:extLst>
+          </p:cNvPr>
+          <p:cNvSpPr>
+            <a:spLocks noGrp="1"/>
+          </p:cNvSpPr>
+          <p:nvPr>
+            <p:ph type="body" idx="1"/>
+          </p:nvPr>
+        </p:nvSpPr>
+        <p:spPr/>
+        <p:txBody>
+          <a:bodyPr/>
+          <a:lstStyle/>
+          <a:p>
+            <a:endParaRPr lang="en-US" dirty="0"/>
+          </a:p>
+        </p:txBody>
+      </p:sp>
+      <p:sp>
+        <p:nvSpPr>
+          <p:cNvPr id="4" name="Slide Number Placeholder 3">
+            <a:extLst>
+              <a:ext uri="{FF2B5EF4-FFF2-40B4-BE49-F238E27FC236}">
+                <a16:creationId xmlns:a16="http://schemas.microsoft.com/office/drawing/2014/main" id="{17DDD107-AD47-8AEE-D68E-C5B47AFF071D}"/>
+              </a:ext>
+            </a:extLst>
+          </p:cNvPr>
+          <p:cNvSpPr>
+            <a:spLocks noGrp="1"/>
+          </p:cNvSpPr>
+          <p:nvPr>
+            <p:ph type="sldNum" sz="quarter" idx="10"/>
+          </p:nvPr>
+        </p:nvSpPr>
+        <p:spPr/>
+        <p:txBody>
+          <a:bodyPr/>
+          <a:lstStyle/>
+          <a:p>
+            <a:fld id="{F7021451-1387-4CA6-816F-3879F97B5CBC}" type="slidenum">
+              <a:rPr lang="en-US"/>
+              <a:t>27</a:t>
+            </a:fld>
+            <a:endParaRPr lang="en-US"/>
+          </a:p>
+        </p:txBody>
+      </p:sp>
+    </p:spTree>
+    <p:extLst>
+      <p:ext uri="{BB962C8B-B14F-4D97-AF65-F5344CB8AC3E}">
+        <p14:creationId xmlns:p14="http://schemas.microsoft.com/office/powerpoint/2010/main" val="3088361052"/>
+      </p:ext>
+    </p:extLst>
+  </p:cSld>
+  <p:clrMapOvr>
+    <a:masterClrMapping/>
+  </p:clrMapOvr>
+</p:notes>
+</file>
+
+<file path=ppt/notesSlides/notesSlide28.xml><?xml version="1.0" encoding="utf-8"?>
+<p:notes xmlns:a="http://schemas.openxmlformats.org/drawingml/2006/main" xmlns:r="http://schemas.openxmlformats.org/officeDocument/2006/relationships" xmlns:p="http://schemas.openxmlformats.org/presentationml/2006/main">
+  <p:cSld>
+    <p:spTree>
+      <p:nvGrpSpPr>
         <p:cNvPr id="1" name=""/>
         <p:cNvGrpSpPr/>
         <p:nvPr/>
@@ -2188,7 +2322,91 @@
           <a:p>
             <a:fld id="{F7021451-1387-4CA6-816F-3879F97B5CBC}" type="slidenum">
               <a:rPr lang="en-US"/>
-              <a:t>27</a:t>
+              <a:t>28</a:t>
+            </a:fld>
+            <a:endParaRPr lang="en-US"/>
+          </a:p>
+        </p:txBody>
+      </p:sp>
+    </p:spTree>
+    <p:extLst>
+      <p:ext uri="{BB962C8B-B14F-4D97-AF65-F5344CB8AC3E}">
+        <p14:creationId xmlns:p14="http://schemas.microsoft.com/office/powerpoint/2010/main" val="1024086991"/>
+      </p:ext>
+    </p:extLst>
+  </p:cSld>
+  <p:clrMapOvr>
+    <a:masterClrMapping/>
+  </p:clrMapOvr>
+</p:notes>
+</file>
+
+<file path=ppt/notesSlides/notesSlide29.xml><?xml version="1.0" encoding="utf-8"?>
+<p:notes xmlns:a="http://schemas.openxmlformats.org/drawingml/2006/main" xmlns:r="http://schemas.openxmlformats.org/officeDocument/2006/relationships" xmlns:p="http://schemas.openxmlformats.org/presentationml/2006/main">
+  <p:cSld>
+    <p:spTree>
+      <p:nvGrpSpPr>
+        <p:cNvPr id="1" name=""/>
+        <p:cNvGrpSpPr/>
+        <p:nvPr/>
+      </p:nvGrpSpPr>
+      <p:grpSpPr>
+        <a:xfrm>
+          <a:off x="0" y="0"/>
+          <a:ext cx="0" cy="0"/>
+          <a:chOff x="0" y="0"/>
+          <a:chExt cx="0" cy="0"/>
+        </a:xfrm>
+      </p:grpSpPr>
+      <p:sp>
+        <p:nvSpPr>
+          <p:cNvPr id="2" name="Slide Image Placeholder 1"/>
+          <p:cNvSpPr>
+            <a:spLocks noGrp="1" noRot="1" noChangeAspect="1"/>
+          </p:cNvSpPr>
+          <p:nvPr>
+            <p:ph type="sldImg"/>
+          </p:nvPr>
+        </p:nvSpPr>
+        <p:spPr/>
+      </p:sp>
+      <p:sp>
+        <p:nvSpPr>
+          <p:cNvPr id="3" name="Notes Placeholder 2"/>
+          <p:cNvSpPr>
+            <a:spLocks noGrp="1"/>
+          </p:cNvSpPr>
+          <p:nvPr>
+            <p:ph type="body" idx="1"/>
+          </p:nvPr>
+        </p:nvSpPr>
+        <p:spPr/>
+        <p:txBody>
+          <a:bodyPr/>
+          <a:lstStyle/>
+          <a:p>
+            <a:endParaRPr lang="en-US" dirty="0"/>
+          </a:p>
+        </p:txBody>
+      </p:sp>
+      <p:sp>
+        <p:nvSpPr>
+          <p:cNvPr id="4" name="Slide Number Placeholder 3"/>
+          <p:cNvSpPr>
+            <a:spLocks noGrp="1"/>
+          </p:cNvSpPr>
+          <p:nvPr>
+            <p:ph type="sldNum" sz="quarter" idx="10"/>
+          </p:nvPr>
+        </p:nvSpPr>
+        <p:spPr/>
+        <p:txBody>
+          <a:bodyPr/>
+          <a:lstStyle/>
+          <a:p>
+            <a:fld id="{F7021451-1387-4CA6-816F-3879F97B5CBC}" type="slidenum">
+              <a:rPr lang="en-US"/>
+              <a:t>29</a:t>
             </a:fld>
             <a:endParaRPr lang="en-US"/>
           </a:p>
@@ -6820,7 +7038,7 @@
         </p:nvSpPr>
         <p:spPr>
           <a:xfrm>
-            <a:off x="548640" y="1005840"/>
+            <a:off x="386334" y="1005840"/>
             <a:ext cx="11094415" cy="640080"/>
           </a:xfrm>
           <a:prstGeom prst="rect">
@@ -6845,7 +7063,73 @@
                 <a:ea typeface="Calibri" pitchFamily="34" charset="-122"/>
                 <a:cs typeface="Calibri" pitchFamily="34" charset="-120"/>
               </a:rPr>
-              <a:t>Baza slučajeva i funkcije sličnosti</a:t>
+              <a:t>Baza slučajeva i </a:t>
+            </a:r>
+            <a:r>
+              <a:rPr lang="en-US" sz="2500" b="1" dirty="0" err="1">
+                <a:solidFill>
+                  <a:srgbClr val="1B2A57"/>
+                </a:solidFill>
+                <a:latin typeface="Calibri" pitchFamily="34" charset="0"/>
+                <a:ea typeface="Calibri" pitchFamily="34" charset="-122"/>
+                <a:cs typeface="Calibri" pitchFamily="34" charset="-120"/>
+              </a:rPr>
+              <a:t>funkcije</a:t>
+            </a:r>
+            <a:r>
+              <a:rPr lang="en-US" sz="2500" b="1" dirty="0">
+                <a:solidFill>
+                  <a:srgbClr val="1B2A57"/>
+                </a:solidFill>
+                <a:latin typeface="Calibri" pitchFamily="34" charset="0"/>
+                <a:ea typeface="Calibri" pitchFamily="34" charset="-122"/>
+                <a:cs typeface="Calibri" pitchFamily="34" charset="-120"/>
+              </a:rPr>
+              <a:t> </a:t>
+            </a:r>
+            <a:r>
+              <a:rPr lang="en-US" sz="2500" b="1" dirty="0" err="1">
+                <a:solidFill>
+                  <a:srgbClr val="1B2A57"/>
+                </a:solidFill>
+                <a:latin typeface="Calibri" pitchFamily="34" charset="0"/>
+                <a:ea typeface="Calibri" pitchFamily="34" charset="-122"/>
+                <a:cs typeface="Calibri" pitchFamily="34" charset="-120"/>
+              </a:rPr>
+              <a:t>sličnosti</a:t>
+            </a:r>
+            <a:r>
+              <a:rPr lang="en-US" sz="2500" b="1" dirty="0">
+                <a:solidFill>
+                  <a:srgbClr val="1B2A57"/>
+                </a:solidFill>
+                <a:latin typeface="Calibri" pitchFamily="34" charset="0"/>
+                <a:ea typeface="Calibri" pitchFamily="34" charset="-122"/>
+                <a:cs typeface="Calibri" pitchFamily="34" charset="-120"/>
+              </a:rPr>
+              <a:t> (</a:t>
+            </a:r>
+            <a:r>
+              <a:rPr lang="en-US" sz="2500" b="1" dirty="0" err="1">
+                <a:solidFill>
+                  <a:srgbClr val="1B2A57"/>
+                </a:solidFill>
+                <a:latin typeface="Calibri" pitchFamily="34" charset="0"/>
+                <a:ea typeface="Calibri" pitchFamily="34" charset="-122"/>
+                <a:cs typeface="Calibri" pitchFamily="34" charset="-120"/>
+              </a:rPr>
+              <a:t>jColibri</a:t>
+            </a:r>
+            <a:r>
+              <a:rPr lang="en-US" sz="2500" b="1" dirty="0">
+                <a:solidFill>
+                  <a:srgbClr val="1B2A57"/>
+                </a:solidFill>
+                <a:latin typeface="Calibri" pitchFamily="34" charset="0"/>
+                <a:ea typeface="Calibri" pitchFamily="34" charset="-122"/>
+                <a:cs typeface="Calibri" pitchFamily="34" charset="-120"/>
+              </a:rPr>
+              <a:t>)</a:t>
             </a:r>
             <a:endParaRPr lang="en-US" sz="2500" dirty="0"/>
           </a:p>
@@ -7524,7 +7808,79 @@
                 <a:effectLst/>
                 <a:latin typeface="Anthropic Sans"/>
               </a:rPr>
-              <a:t>, …)</a:t>
+              <a:t>, …) (ne </a:t>
+            </a:r>
+            <a:r>
+              <a:rPr lang="en-US" sz="2000" b="0" i="0" dirty="0" err="1">
+                <a:solidFill>
+                  <a:schemeClr val="bg2">
+                    <a:lumMod val="75000"/>
+                  </a:schemeClr>
+                </a:solidFill>
+                <a:effectLst/>
+                <a:latin typeface="Anthropic Sans"/>
+              </a:rPr>
+              <a:t>utiču</a:t>
+            </a:r>
+            <a:r>
+              <a:rPr lang="en-US" sz="2000" b="0" i="0" dirty="0">
+                <a:solidFill>
+                  <a:schemeClr val="bg2">
+                    <a:lumMod val="75000"/>
+                  </a:schemeClr>
+                </a:solidFill>
+                <a:effectLst/>
+                <a:latin typeface="Anthropic Sans"/>
+              </a:rPr>
+              <a:t> </a:t>
+            </a:r>
+            <a:r>
+              <a:rPr lang="en-US" sz="2000" b="0" i="0" dirty="0" err="1">
+                <a:solidFill>
+                  <a:schemeClr val="bg2">
+                    <a:lumMod val="75000"/>
+                  </a:schemeClr>
+                </a:solidFill>
+                <a:effectLst/>
+                <a:latin typeface="Anthropic Sans"/>
+              </a:rPr>
+              <a:t>na</a:t>
+            </a:r>
+            <a:r>
+              <a:rPr lang="en-US" sz="2000" b="0" i="0" dirty="0">
+                <a:solidFill>
+                  <a:schemeClr val="bg2">
+                    <a:lumMod val="75000"/>
+                  </a:schemeClr>
+                </a:solidFill>
+                <a:effectLst/>
+                <a:latin typeface="Anthropic Sans"/>
+              </a:rPr>
+              <a:t> </a:t>
+            </a:r>
+            <a:r>
+              <a:rPr lang="en-US" sz="2000" b="0" i="0" dirty="0" err="1">
+                <a:solidFill>
+                  <a:schemeClr val="bg2">
+                    <a:lumMod val="75000"/>
+                  </a:schemeClr>
+                </a:solidFill>
+                <a:effectLst/>
+                <a:latin typeface="Anthropic Sans"/>
+              </a:rPr>
+              <a:t>kaznu</a:t>
+            </a:r>
+            <a:r>
+              <a:rPr lang="en-US" sz="2000" b="0" i="0" dirty="0">
+                <a:solidFill>
+                  <a:schemeClr val="bg2">
+                    <a:lumMod val="75000"/>
+                  </a:schemeClr>
+                </a:solidFill>
+                <a:effectLst/>
+                <a:latin typeface="Anthropic Sans"/>
+              </a:rPr>
+              <a:t>)</a:t>
             </a:r>
           </a:p>
           <a:p>
@@ -7845,7 +8201,7 @@
         </p:nvSpPr>
         <p:spPr>
           <a:xfrm>
-            <a:off x="548640" y="4168982"/>
+            <a:off x="548640" y="3658914"/>
             <a:ext cx="6094140" cy="1569660"/>
           </a:xfrm>
           <a:prstGeom prst="rect">
@@ -8068,6 +8424,17 @@
               <a:buNone/>
             </a:pPr>
             <a:r>
+              <a:rPr lang="en-US" sz="2500" b="1" dirty="0" err="1">
+                <a:solidFill>
+                  <a:srgbClr val="1B2A57"/>
+                </a:solidFill>
+                <a:latin typeface="Calibri" pitchFamily="34" charset="0"/>
+                <a:ea typeface="Calibri" pitchFamily="34" charset="-122"/>
+                <a:cs typeface="Calibri" pitchFamily="34" charset="-120"/>
+              </a:rPr>
+              <a:t>Pregled</a:t>
+            </a:r>
+            <a:r>
               <a:rPr lang="en-US" sz="2500" b="1" dirty="0">
                 <a:solidFill>
                   <a:srgbClr val="1B2A57"/>
@@ -8076,9 +8443,304 @@
                 <a:ea typeface="Calibri" pitchFamily="34" charset="-122"/>
                 <a:cs typeface="Calibri" pitchFamily="34" charset="-120"/>
               </a:rPr>
-              <a:t>Baza slučajeva i funkcije sličnosti</a:t>
+              <a:t> </a:t>
+            </a:r>
+            <a:r>
+              <a:rPr lang="en-US" sz="2500" b="1" dirty="0" err="1">
+                <a:solidFill>
+                  <a:srgbClr val="1B2A57"/>
+                </a:solidFill>
+                <a:latin typeface="Calibri" pitchFamily="34" charset="0"/>
+                <a:ea typeface="Calibri" pitchFamily="34" charset="-122"/>
+                <a:cs typeface="Calibri" pitchFamily="34" charset="-120"/>
+              </a:rPr>
+              <a:t>atributa</a:t>
+            </a:r>
+            <a:r>
+              <a:rPr lang="en-US" sz="2500" b="1" dirty="0">
+                <a:solidFill>
+                  <a:srgbClr val="1B2A57"/>
+                </a:solidFill>
+                <a:latin typeface="Calibri" pitchFamily="34" charset="0"/>
+                <a:ea typeface="Calibri" pitchFamily="34" charset="-122"/>
+                <a:cs typeface="Calibri" pitchFamily="34" charset="-120"/>
+              </a:rPr>
+              <a:t> </a:t>
+            </a:r>
+            <a:r>
+              <a:rPr lang="en-US" sz="2500" b="1" dirty="0" err="1">
+                <a:solidFill>
+                  <a:srgbClr val="1B2A57"/>
+                </a:solidFill>
+                <a:latin typeface="Calibri" pitchFamily="34" charset="0"/>
+                <a:ea typeface="Calibri" pitchFamily="34" charset="-122"/>
+                <a:cs typeface="Calibri" pitchFamily="34" charset="-120"/>
+              </a:rPr>
+              <a:t>i</a:t>
+            </a:r>
+            <a:r>
+              <a:rPr lang="en-US" sz="2500" b="1" dirty="0">
+                <a:solidFill>
+                  <a:srgbClr val="1B2A57"/>
+                </a:solidFill>
+                <a:latin typeface="Calibri" pitchFamily="34" charset="0"/>
+                <a:ea typeface="Calibri" pitchFamily="34" charset="-122"/>
+                <a:cs typeface="Calibri" pitchFamily="34" charset="-120"/>
+              </a:rPr>
+              <a:t> </a:t>
+            </a:r>
+            <a:r>
+              <a:rPr lang="en-US" sz="2500" b="1" dirty="0" err="1">
+                <a:solidFill>
+                  <a:srgbClr val="1B2A57"/>
+                </a:solidFill>
+                <a:latin typeface="Calibri" pitchFamily="34" charset="0"/>
+                <a:ea typeface="Calibri" pitchFamily="34" charset="-122"/>
+                <a:cs typeface="Calibri" pitchFamily="34" charset="-120"/>
+              </a:rPr>
+              <a:t>činjenica</a:t>
             </a:r>
             <a:endParaRPr lang="en-US" sz="2500" dirty="0"/>
+          </a:p>
+        </p:txBody>
+      </p:sp>
+      <p:sp>
+        <p:nvSpPr>
+          <p:cNvPr id="3" name="TextBox 2">
+            <a:extLst>
+              <a:ext uri="{FF2B5EF4-FFF2-40B4-BE49-F238E27FC236}">
+                <a16:creationId xmlns:a16="http://schemas.microsoft.com/office/drawing/2014/main" id="{A9B79382-12FB-98F6-8CB6-79497D4F0C22}"/>
+              </a:ext>
+            </a:extLst>
+          </p:cNvPr>
+          <p:cNvSpPr txBox="1"/>
+          <p:nvPr/>
+        </p:nvSpPr>
+        <p:spPr>
+          <a:xfrm>
+            <a:off x="510915" y="5569803"/>
+            <a:ext cx="11387152" cy="830997"/>
+          </a:xfrm>
+          <a:prstGeom prst="rect">
+            <a:avLst/>
+          </a:prstGeom>
+          <a:noFill/>
+        </p:spPr>
+        <p:txBody>
+          <a:bodyPr wrap="square">
+            <a:spAutoFit/>
+          </a:bodyPr>
+          <a:lstStyle/>
+          <a:p>
+            <a:pPr algn="ctr"/>
+            <a:r>
+              <a:rPr lang="en-US" sz="2400" dirty="0" err="1">
+                <a:solidFill>
+                  <a:srgbClr val="FF0000"/>
+                </a:solidFill>
+              </a:rPr>
+              <a:t>Iako</a:t>
+            </a:r>
+            <a:r>
+              <a:rPr lang="en-US" sz="2400" dirty="0">
+                <a:solidFill>
+                  <a:srgbClr val="FF0000"/>
+                </a:solidFill>
+              </a:rPr>
+              <a:t> </a:t>
+            </a:r>
+            <a:r>
+              <a:rPr lang="en-US" sz="2400" dirty="0" err="1">
+                <a:solidFill>
+                  <a:srgbClr val="FF0000"/>
+                </a:solidFill>
+              </a:rPr>
+              <a:t>su</a:t>
+            </a:r>
+            <a:r>
+              <a:rPr lang="en-US" sz="2400" dirty="0">
+                <a:solidFill>
+                  <a:srgbClr val="FF0000"/>
+                </a:solidFill>
+              </a:rPr>
+              <a:t> </a:t>
+            </a:r>
+            <a:r>
+              <a:rPr lang="en-US" sz="2400" dirty="0" err="1">
+                <a:solidFill>
+                  <a:srgbClr val="FF0000"/>
+                </a:solidFill>
+              </a:rPr>
+              <a:t>svi</a:t>
+            </a:r>
+            <a:r>
+              <a:rPr lang="en-US" sz="2400" dirty="0">
+                <a:solidFill>
+                  <a:srgbClr val="FF0000"/>
+                </a:solidFill>
+              </a:rPr>
+              <a:t> </a:t>
+            </a:r>
+            <a:r>
+              <a:rPr lang="en-US" sz="2400" dirty="0" err="1">
+                <a:solidFill>
+                  <a:srgbClr val="FF0000"/>
+                </a:solidFill>
+              </a:rPr>
+              <a:t>atributi</a:t>
+            </a:r>
+            <a:r>
+              <a:rPr lang="en-US" sz="2400" dirty="0">
+                <a:solidFill>
+                  <a:srgbClr val="FF0000"/>
+                </a:solidFill>
+              </a:rPr>
+              <a:t> u </a:t>
+            </a:r>
+            <a:r>
+              <a:rPr lang="en-US" sz="2400" dirty="0" err="1">
+                <a:solidFill>
+                  <a:srgbClr val="FF0000"/>
+                </a:solidFill>
+              </a:rPr>
+              <a:t>jednom</a:t>
+            </a:r>
+            <a:r>
+              <a:rPr lang="en-US" sz="2400" dirty="0">
+                <a:solidFill>
+                  <a:srgbClr val="FF0000"/>
+                </a:solidFill>
+              </a:rPr>
+              <a:t> .csv </a:t>
+            </a:r>
+            <a:r>
+              <a:rPr lang="en-US" sz="2400" dirty="0" err="1">
+                <a:solidFill>
+                  <a:srgbClr val="FF0000"/>
+                </a:solidFill>
+              </a:rPr>
+              <a:t>fajlu</a:t>
+            </a:r>
+            <a:r>
+              <a:rPr lang="en-US" sz="2400" dirty="0">
+                <a:solidFill>
+                  <a:srgbClr val="FF0000"/>
+                </a:solidFill>
+              </a:rPr>
+              <a:t>, </a:t>
+            </a:r>
+            <a:r>
+              <a:rPr lang="en-US" sz="2400" dirty="0" err="1">
+                <a:solidFill>
+                  <a:srgbClr val="FF0000"/>
+                </a:solidFill>
+              </a:rPr>
+              <a:t>postoji</a:t>
+            </a:r>
+            <a:r>
+              <a:rPr lang="en-US" sz="2400" dirty="0">
+                <a:solidFill>
+                  <a:srgbClr val="FF0000"/>
+                </a:solidFill>
+              </a:rPr>
+              <a:t> prefilter koji </a:t>
+            </a:r>
+            <a:r>
+              <a:rPr lang="en-US" sz="2400" dirty="0" err="1">
+                <a:solidFill>
+                  <a:srgbClr val="FF0000"/>
+                </a:solidFill>
+              </a:rPr>
+              <a:t>selektuje</a:t>
+            </a:r>
+            <a:r>
+              <a:rPr lang="en-US" sz="2400" dirty="0">
+                <a:solidFill>
+                  <a:srgbClr val="FF0000"/>
+                </a:solidFill>
+              </a:rPr>
+              <a:t> </a:t>
+            </a:r>
+            <a:r>
+              <a:rPr lang="en-US" sz="2400" dirty="0" err="1">
+                <a:solidFill>
+                  <a:srgbClr val="FF0000"/>
+                </a:solidFill>
+              </a:rPr>
+              <a:t>samo</a:t>
+            </a:r>
+            <a:r>
+              <a:rPr lang="en-US" sz="2400" dirty="0">
+                <a:solidFill>
+                  <a:srgbClr val="FF0000"/>
+                </a:solidFill>
+              </a:rPr>
+              <a:t> </a:t>
+            </a:r>
+            <a:r>
+              <a:rPr lang="en-US" sz="2400" dirty="0" err="1">
+                <a:solidFill>
+                  <a:srgbClr val="FF0000"/>
+                </a:solidFill>
+              </a:rPr>
+              <a:t>određene</a:t>
+            </a:r>
+            <a:r>
+              <a:rPr lang="en-US" sz="2400" dirty="0">
+                <a:solidFill>
+                  <a:srgbClr val="FF0000"/>
+                </a:solidFill>
+              </a:rPr>
+              <a:t> u </a:t>
+            </a:r>
+            <a:r>
+              <a:rPr lang="en-US" sz="2400" dirty="0" err="1">
+                <a:solidFill>
+                  <a:srgbClr val="FF0000"/>
+                </a:solidFill>
+              </a:rPr>
+              <a:t>zavisnosti</a:t>
+            </a:r>
+            <a:r>
+              <a:rPr lang="en-US" sz="2400" dirty="0">
+                <a:solidFill>
+                  <a:srgbClr val="FF0000"/>
+                </a:solidFill>
+              </a:rPr>
+              <a:t> od </a:t>
+            </a:r>
+            <a:r>
+              <a:rPr lang="en-US" sz="2400" dirty="0" err="1">
+                <a:solidFill>
+                  <a:srgbClr val="FF0000"/>
+                </a:solidFill>
+              </a:rPr>
+              <a:t>tipa</a:t>
+            </a:r>
+            <a:r>
+              <a:rPr lang="en-US" sz="2400" dirty="0">
+                <a:solidFill>
+                  <a:srgbClr val="FF0000"/>
+                </a:solidFill>
+              </a:rPr>
+              <a:t> </a:t>
+            </a:r>
+            <a:r>
+              <a:rPr lang="en-US" sz="2400" dirty="0" err="1">
+                <a:solidFill>
+                  <a:srgbClr val="FF0000"/>
+                </a:solidFill>
+              </a:rPr>
+              <a:t>krivičnog</a:t>
+            </a:r>
+            <a:r>
+              <a:rPr lang="en-US" sz="2400" dirty="0">
+                <a:solidFill>
+                  <a:srgbClr val="FF0000"/>
+                </a:solidFill>
+              </a:rPr>
+              <a:t> dela</a:t>
+            </a:r>
           </a:p>
         </p:txBody>
       </p:sp>
@@ -8926,6 +9588,374 @@
         <p:cNvPr id="1" name="">
           <a:extLst>
             <a:ext uri="{FF2B5EF4-FFF2-40B4-BE49-F238E27FC236}">
+              <a16:creationId xmlns:a16="http://schemas.microsoft.com/office/drawing/2014/main" id="{B64E471E-25CC-F035-0A44-605D5FB0D299}"/>
+            </a:ext>
+          </a:extLst>
+        </p:cNvPr>
+        <p:cNvGrpSpPr/>
+        <p:nvPr/>
+      </p:nvGrpSpPr>
+      <p:grpSpPr>
+        <a:xfrm>
+          <a:off x="0" y="0"/>
+          <a:ext cx="0" cy="0"/>
+          <a:chOff x="0" y="0"/>
+          <a:chExt cx="0" cy="0"/>
+        </a:xfrm>
+      </p:grpSpPr>
+      <p:sp>
+        <p:nvSpPr>
+          <p:cNvPr id="24" name="Shape 0">
+            <a:extLst>
+              <a:ext uri="{FF2B5EF4-FFF2-40B4-BE49-F238E27FC236}">
+                <a16:creationId xmlns:a16="http://schemas.microsoft.com/office/drawing/2014/main" id="{B00E0705-7911-BD4D-0B0E-A9F7E2B4625B}"/>
+              </a:ext>
+            </a:extLst>
+          </p:cNvPr>
+          <p:cNvSpPr/>
+          <p:nvPr/>
+        </p:nvSpPr>
+        <p:spPr>
+          <a:xfrm>
+            <a:off x="548640" y="411480"/>
+            <a:ext cx="914400" cy="457200"/>
+          </a:xfrm>
+          <a:prstGeom prst="roundRect">
+            <a:avLst>
+              <a:gd name="adj" fmla="val 16000"/>
+            </a:avLst>
+          </a:prstGeom>
+          <a:solidFill>
+            <a:srgbClr val="1B2A57"/>
+          </a:solidFill>
+          <a:ln/>
+        </p:spPr>
+      </p:sp>
+      <p:sp>
+        <p:nvSpPr>
+          <p:cNvPr id="25" name="Text 1">
+            <a:extLst>
+              <a:ext uri="{FF2B5EF4-FFF2-40B4-BE49-F238E27FC236}">
+                <a16:creationId xmlns:a16="http://schemas.microsoft.com/office/drawing/2014/main" id="{2A9AF2A9-1396-6DE4-AB73-25883456A9CD}"/>
+              </a:ext>
+            </a:extLst>
+          </p:cNvPr>
+          <p:cNvSpPr/>
+          <p:nvPr/>
+        </p:nvSpPr>
+        <p:spPr>
+          <a:xfrm>
+            <a:off x="548640" y="411480"/>
+            <a:ext cx="914400" cy="457200"/>
+          </a:xfrm>
+          <a:prstGeom prst="rect">
+            <a:avLst/>
+          </a:prstGeom>
+          <a:noFill/>
+          <a:ln/>
+        </p:spPr>
+        <p:txBody>
+          <a:bodyPr wrap="square" lIns="0" tIns="0" rIns="0" bIns="0" rtlCol="0" anchor="ctr"/>
+          <a:lstStyle/>
+          <a:p>
+            <a:pPr marL="0" indent="0" algn="ctr">
+              <a:buNone/>
+            </a:pPr>
+            <a:r>
+              <a:rPr lang="en-US" sz="1800" b="1" dirty="0">
+                <a:solidFill>
+                  <a:srgbClr val="FFFFFF"/>
+                </a:solidFill>
+                <a:latin typeface="Calibri" pitchFamily="34" charset="0"/>
+                <a:ea typeface="Calibri" pitchFamily="34" charset="-122"/>
+                <a:cs typeface="Calibri" pitchFamily="34" charset="-120"/>
+              </a:rPr>
+              <a:t>Z6</a:t>
+            </a:r>
+            <a:endParaRPr lang="en-US" sz="1800" dirty="0"/>
+          </a:p>
+        </p:txBody>
+      </p:sp>
+      <p:sp>
+        <p:nvSpPr>
+          <p:cNvPr id="26" name="Text 2">
+            <a:extLst>
+              <a:ext uri="{FF2B5EF4-FFF2-40B4-BE49-F238E27FC236}">
+                <a16:creationId xmlns:a16="http://schemas.microsoft.com/office/drawing/2014/main" id="{FC9F8E84-F798-5E00-329B-AB9B75497016}"/>
+              </a:ext>
+            </a:extLst>
+          </p:cNvPr>
+          <p:cNvSpPr/>
+          <p:nvPr/>
+        </p:nvSpPr>
+        <p:spPr>
+          <a:xfrm>
+            <a:off x="1600200" y="457200"/>
+            <a:ext cx="10088575" cy="274320"/>
+          </a:xfrm>
+          <a:prstGeom prst="rect">
+            <a:avLst/>
+          </a:prstGeom>
+          <a:noFill/>
+          <a:ln/>
+        </p:spPr>
+        <p:txBody>
+          <a:bodyPr wrap="square" lIns="0" tIns="0" rIns="0" bIns="0" rtlCol="0" anchor="ctr"/>
+          <a:lstStyle/>
+          <a:p>
+            <a:pPr marL="0" indent="0">
+              <a:buNone/>
+            </a:pPr>
+            <a:r>
+              <a:rPr lang="en-US" sz="1100" b="1" kern="0" spc="200" dirty="0">
+                <a:solidFill>
+                  <a:srgbClr val="1FAFA0"/>
+                </a:solidFill>
+                <a:latin typeface="Calibri" pitchFamily="34" charset="0"/>
+                <a:ea typeface="Calibri" pitchFamily="34" charset="-122"/>
+                <a:cs typeface="Calibri" pitchFamily="34" charset="-120"/>
+              </a:rPr>
+              <a:t>ZADATAK 6 IZ SPECIFIKACIJE</a:t>
+            </a:r>
+            <a:endParaRPr lang="en-US" sz="1100" dirty="0"/>
+          </a:p>
+        </p:txBody>
+      </p:sp>
+      <p:pic>
+        <p:nvPicPr>
+          <p:cNvPr id="2" name="Picture 1">
+            <a:extLst>
+              <a:ext uri="{FF2B5EF4-FFF2-40B4-BE49-F238E27FC236}">
+                <a16:creationId xmlns:a16="http://schemas.microsoft.com/office/drawing/2014/main" id="{00A8B153-D55F-ADA4-625C-0B8214F40DDE}"/>
+              </a:ext>
+            </a:extLst>
+          </p:cNvPr>
+          <p:cNvPicPr>
+            <a:picLocks noChangeAspect="1"/>
+          </p:cNvPicPr>
+          <p:nvPr/>
+        </p:nvPicPr>
+        <p:blipFill>
+          <a:blip r:embed="rId3"/>
+          <a:stretch>
+            <a:fillRect/>
+          </a:stretch>
+        </p:blipFill>
+        <p:spPr>
+          <a:xfrm>
+            <a:off x="732692" y="1224319"/>
+            <a:ext cx="9235272" cy="5222201"/>
+          </a:xfrm>
+          <a:prstGeom prst="rect">
+            <a:avLst/>
+          </a:prstGeom>
+        </p:spPr>
+      </p:pic>
+    </p:spTree>
+    <p:extLst>
+      <p:ext uri="{BB962C8B-B14F-4D97-AF65-F5344CB8AC3E}">
+        <p14:creationId xmlns:p14="http://schemas.microsoft.com/office/powerpoint/2010/main" val="3858752914"/>
+      </p:ext>
+    </p:extLst>
+  </p:cSld>
+  <p:clrMapOvr>
+    <a:masterClrMapping/>
+  </p:clrMapOvr>
+</p:sld>
+</file>
+
+<file path=ppt/slides/slide21.xml><?xml version="1.0" encoding="utf-8"?>
+<p:sld xmlns:a="http://schemas.openxmlformats.org/drawingml/2006/main" xmlns:r="http://schemas.openxmlformats.org/officeDocument/2006/relationships" xmlns:p="http://schemas.openxmlformats.org/presentationml/2006/main">
+  <p:cSld>
+    <p:spTree>
+      <p:nvGrpSpPr>
+        <p:cNvPr id="1" name="">
+          <a:extLst>
+            <a:ext uri="{FF2B5EF4-FFF2-40B4-BE49-F238E27FC236}">
+              <a16:creationId xmlns:a16="http://schemas.microsoft.com/office/drawing/2014/main" id="{09F04A64-F75A-7F6E-5343-AF8855CC3CE3}"/>
+            </a:ext>
+          </a:extLst>
+        </p:cNvPr>
+        <p:cNvGrpSpPr/>
+        <p:nvPr/>
+      </p:nvGrpSpPr>
+      <p:grpSpPr>
+        <a:xfrm>
+          <a:off x="0" y="0"/>
+          <a:ext cx="0" cy="0"/>
+          <a:chOff x="0" y="0"/>
+          <a:chExt cx="0" cy="0"/>
+        </a:xfrm>
+      </p:grpSpPr>
+      <p:sp>
+        <p:nvSpPr>
+          <p:cNvPr id="24" name="Shape 0">
+            <a:extLst>
+              <a:ext uri="{FF2B5EF4-FFF2-40B4-BE49-F238E27FC236}">
+                <a16:creationId xmlns:a16="http://schemas.microsoft.com/office/drawing/2014/main" id="{F39939A1-26A8-6BC1-4666-E4A714DE20DD}"/>
+              </a:ext>
+            </a:extLst>
+          </p:cNvPr>
+          <p:cNvSpPr/>
+          <p:nvPr/>
+        </p:nvSpPr>
+        <p:spPr>
+          <a:xfrm>
+            <a:off x="548640" y="411480"/>
+            <a:ext cx="914400" cy="457200"/>
+          </a:xfrm>
+          <a:prstGeom prst="roundRect">
+            <a:avLst>
+              <a:gd name="adj" fmla="val 16000"/>
+            </a:avLst>
+          </a:prstGeom>
+          <a:solidFill>
+            <a:srgbClr val="1B2A57"/>
+          </a:solidFill>
+          <a:ln/>
+        </p:spPr>
+      </p:sp>
+      <p:sp>
+        <p:nvSpPr>
+          <p:cNvPr id="25" name="Text 1">
+            <a:extLst>
+              <a:ext uri="{FF2B5EF4-FFF2-40B4-BE49-F238E27FC236}">
+                <a16:creationId xmlns:a16="http://schemas.microsoft.com/office/drawing/2014/main" id="{25F98F62-1213-EC88-AB0E-CA1E059DC92D}"/>
+              </a:ext>
+            </a:extLst>
+          </p:cNvPr>
+          <p:cNvSpPr/>
+          <p:nvPr/>
+        </p:nvSpPr>
+        <p:spPr>
+          <a:xfrm>
+            <a:off x="548640" y="411480"/>
+            <a:ext cx="914400" cy="457200"/>
+          </a:xfrm>
+          <a:prstGeom prst="rect">
+            <a:avLst/>
+          </a:prstGeom>
+          <a:noFill/>
+          <a:ln/>
+        </p:spPr>
+        <p:txBody>
+          <a:bodyPr wrap="square" lIns="0" tIns="0" rIns="0" bIns="0" rtlCol="0" anchor="ctr"/>
+          <a:lstStyle/>
+          <a:p>
+            <a:pPr marL="0" indent="0" algn="ctr">
+              <a:buNone/>
+            </a:pPr>
+            <a:r>
+              <a:rPr lang="en-US" sz="1800" b="1" dirty="0">
+                <a:solidFill>
+                  <a:srgbClr val="FFFFFF"/>
+                </a:solidFill>
+                <a:latin typeface="Calibri" pitchFamily="34" charset="0"/>
+                <a:ea typeface="Calibri" pitchFamily="34" charset="-122"/>
+                <a:cs typeface="Calibri" pitchFamily="34" charset="-120"/>
+              </a:rPr>
+              <a:t>Z6</a:t>
+            </a:r>
+            <a:endParaRPr lang="en-US" sz="1800" dirty="0"/>
+          </a:p>
+        </p:txBody>
+      </p:sp>
+      <p:sp>
+        <p:nvSpPr>
+          <p:cNvPr id="26" name="Text 2">
+            <a:extLst>
+              <a:ext uri="{FF2B5EF4-FFF2-40B4-BE49-F238E27FC236}">
+                <a16:creationId xmlns:a16="http://schemas.microsoft.com/office/drawing/2014/main" id="{73870D56-EF4E-386C-E155-80C35EFDF2A9}"/>
+              </a:ext>
+            </a:extLst>
+          </p:cNvPr>
+          <p:cNvSpPr/>
+          <p:nvPr/>
+        </p:nvSpPr>
+        <p:spPr>
+          <a:xfrm>
+            <a:off x="1600200" y="457200"/>
+            <a:ext cx="10088575" cy="274320"/>
+          </a:xfrm>
+          <a:prstGeom prst="rect">
+            <a:avLst/>
+          </a:prstGeom>
+          <a:noFill/>
+          <a:ln/>
+        </p:spPr>
+        <p:txBody>
+          <a:bodyPr wrap="square" lIns="0" tIns="0" rIns="0" bIns="0" rtlCol="0" anchor="ctr"/>
+          <a:lstStyle/>
+          <a:p>
+            <a:pPr marL="0" indent="0">
+              <a:buNone/>
+            </a:pPr>
+            <a:r>
+              <a:rPr lang="en-US" sz="1100" b="1" kern="0" spc="200" dirty="0">
+                <a:solidFill>
+                  <a:srgbClr val="1FAFA0"/>
+                </a:solidFill>
+                <a:latin typeface="Calibri" pitchFamily="34" charset="0"/>
+                <a:ea typeface="Calibri" pitchFamily="34" charset="-122"/>
+                <a:cs typeface="Calibri" pitchFamily="34" charset="-120"/>
+              </a:rPr>
+              <a:t>ZADATAK 6 IZ SPECIFIKACIJE</a:t>
+            </a:r>
+            <a:endParaRPr lang="en-US" sz="1100" dirty="0"/>
+          </a:p>
+        </p:txBody>
+      </p:sp>
+      <p:pic>
+        <p:nvPicPr>
+          <p:cNvPr id="3" name="Picture 2">
+            <a:extLst>
+              <a:ext uri="{FF2B5EF4-FFF2-40B4-BE49-F238E27FC236}">
+                <a16:creationId xmlns:a16="http://schemas.microsoft.com/office/drawing/2014/main" id="{A20D83C0-6664-56C1-A12B-D16A01A502B0}"/>
+              </a:ext>
+            </a:extLst>
+          </p:cNvPr>
+          <p:cNvPicPr>
+            <a:picLocks noChangeAspect="1"/>
+          </p:cNvPicPr>
+          <p:nvPr/>
+        </p:nvPicPr>
+        <p:blipFill>
+          <a:blip r:embed="rId3"/>
+          <a:stretch>
+            <a:fillRect/>
+          </a:stretch>
+        </p:blipFill>
+        <p:spPr>
+          <a:xfrm>
+            <a:off x="933659" y="1268517"/>
+            <a:ext cx="9677400" cy="5132283"/>
+          </a:xfrm>
+          <a:prstGeom prst="rect">
+            <a:avLst/>
+          </a:prstGeom>
+        </p:spPr>
+      </p:pic>
+    </p:spTree>
+    <p:extLst>
+      <p:ext uri="{BB962C8B-B14F-4D97-AF65-F5344CB8AC3E}">
+        <p14:creationId xmlns:p14="http://schemas.microsoft.com/office/powerpoint/2010/main" val="2110833208"/>
+      </p:ext>
+    </p:extLst>
+  </p:cSld>
+  <p:clrMapOvr>
+    <a:masterClrMapping/>
+  </p:clrMapOvr>
+</p:sld>
+</file>
+
+<file path=ppt/slides/slide22.xml><?xml version="1.0" encoding="utf-8"?>
+<p:sld xmlns:a="http://schemas.openxmlformats.org/drawingml/2006/main" xmlns:r="http://schemas.openxmlformats.org/officeDocument/2006/relationships" xmlns:p="http://schemas.openxmlformats.org/presentationml/2006/main">
+  <p:cSld>
+    <p:spTree>
+      <p:nvGrpSpPr>
+        <p:cNvPr id="1" name="">
+          <a:extLst>
+            <a:ext uri="{FF2B5EF4-FFF2-40B4-BE49-F238E27FC236}">
               <a16:creationId xmlns:a16="http://schemas.microsoft.com/office/drawing/2014/main" id="{711F50E2-0280-1859-420C-BDE4A25E51D0}"/>
             </a:ext>
           </a:extLst>
@@ -10387,7 +11417,7 @@
 </p:sld>
 </file>
 
-<file path=ppt/slides/slide21.xml><?xml version="1.0" encoding="utf-8"?>
+<file path=ppt/slides/slide23.xml><?xml version="1.0" encoding="utf-8"?>
 <p:sld xmlns:a="http://schemas.openxmlformats.org/drawingml/2006/main" xmlns:r="http://schemas.openxmlformats.org/officeDocument/2006/relationships" xmlns:p="http://schemas.openxmlformats.org/presentationml/2006/main">
   <p:cSld name="Slide 10">
     <p:bg>
@@ -11039,7 +12069,7 @@
 </p:sld>
 </file>
 
-<file path=ppt/slides/slide22.xml><?xml version="1.0" encoding="utf-8"?>
+<file path=ppt/slides/slide24.xml><?xml version="1.0" encoding="utf-8"?>
 <p:sld xmlns:a="http://schemas.openxmlformats.org/drawingml/2006/main" xmlns:r="http://schemas.openxmlformats.org/officeDocument/2006/relationships" xmlns:p="http://schemas.openxmlformats.org/presentationml/2006/main">
   <p:cSld>
     <p:bg>
@@ -11389,7 +12419,7 @@
 </p:sld>
 </file>
 
-<file path=ppt/slides/slide23.xml><?xml version="1.0" encoding="utf-8"?>
+<file path=ppt/slides/slide25.xml><?xml version="1.0" encoding="utf-8"?>
 <p:sld xmlns:a="http://schemas.openxmlformats.org/drawingml/2006/main" xmlns:r="http://schemas.openxmlformats.org/officeDocument/2006/relationships" xmlns:p="http://schemas.openxmlformats.org/presentationml/2006/main">
   <p:cSld name="Slide 11">
     <p:bg>
@@ -12220,7 +13250,7 @@
 </p:sld>
 </file>
 
-<file path=ppt/slides/slide24.xml><?xml version="1.0" encoding="utf-8"?>
+<file path=ppt/slides/slide26.xml><?xml version="1.0" encoding="utf-8"?>
 <p:sld xmlns:a="http://schemas.openxmlformats.org/drawingml/2006/main" xmlns:r="http://schemas.openxmlformats.org/officeDocument/2006/relationships" xmlns:p="http://schemas.openxmlformats.org/presentationml/2006/main">
   <p:cSld name="Slide 12">
     <p:bg>
@@ -12417,7 +13447,51 @@
                 <a:ea typeface="Calibri" pitchFamily="34" charset="-122"/>
                 <a:cs typeface="Calibri" pitchFamily="34" charset="-120"/>
               </a:rPr>
-              <a:t>Tekst odluke generiše se kombinacijom statističkog jezičkog modela i šablona, po </a:t>
+              <a:t>Tekst odluke generiše se kombinacijom statističkog </a:t>
+            </a:r>
+            <a:r>
+              <a:rPr lang="en-US" sz="2000" dirty="0" err="1">
+                <a:solidFill>
+                  <a:srgbClr val="16213E"/>
+                </a:solidFill>
+                <a:latin typeface="Calibri" pitchFamily="34" charset="0"/>
+                <a:ea typeface="Calibri" pitchFamily="34" charset="-122"/>
+                <a:cs typeface="Calibri" pitchFamily="34" charset="-120"/>
+              </a:rPr>
+              <a:t>jezičkog</a:t>
+            </a:r>
+            <a:r>
+              <a:rPr lang="en-US" sz="2000" dirty="0">
+                <a:solidFill>
+                  <a:srgbClr val="16213E"/>
+                </a:solidFill>
+                <a:latin typeface="Calibri" pitchFamily="34" charset="0"/>
+                <a:ea typeface="Calibri" pitchFamily="34" charset="-122"/>
+                <a:cs typeface="Calibri" pitchFamily="34" charset="-120"/>
+              </a:rPr>
+              <a:t> </a:t>
+            </a:r>
+            <a:r>
+              <a:rPr lang="en-US" sz="2000" dirty="0" err="1">
+                <a:solidFill>
+                  <a:srgbClr val="16213E"/>
+                </a:solidFill>
+                <a:latin typeface="Calibri" pitchFamily="34" charset="0"/>
+                <a:ea typeface="Calibri" pitchFamily="34" charset="-122"/>
+                <a:cs typeface="Calibri" pitchFamily="34" charset="-120"/>
+              </a:rPr>
+              <a:t>modela</a:t>
+            </a:r>
+            <a:r>
+              <a:rPr lang="en-US" sz="2000" dirty="0">
+                <a:solidFill>
+                  <a:srgbClr val="16213E"/>
+                </a:solidFill>
+                <a:latin typeface="Calibri" pitchFamily="34" charset="0"/>
+                <a:ea typeface="Calibri" pitchFamily="34" charset="-122"/>
+                <a:cs typeface="Calibri" pitchFamily="34" charset="-120"/>
+              </a:rPr>
+              <a:t> (MC) i šablona, po </a:t>
             </a:r>
             <a:r>
               <a:rPr lang="en-US" sz="2000" dirty="0" err="1">
@@ -12728,7 +13802,7 @@
 </p:sld>
 </file>
 
-<file path=ppt/slides/slide25.xml><?xml version="1.0" encoding="utf-8"?>
+<file path=ppt/slides/slide27.xml><?xml version="1.0" encoding="utf-8"?>
 <p:sld xmlns:a="http://schemas.openxmlformats.org/drawingml/2006/main" xmlns:r="http://schemas.openxmlformats.org/officeDocument/2006/relationships" xmlns:p="http://schemas.openxmlformats.org/presentationml/2006/main">
   <p:cSld>
     <p:spTree>
@@ -13178,7 +14252,7 @@
 </p:sld>
 </file>
 
-<file path=ppt/slides/slide26.xml><?xml version="1.0" encoding="utf-8"?>
+<file path=ppt/slides/slide28.xml><?xml version="1.0" encoding="utf-8"?>
 <p:sld xmlns:a="http://schemas.openxmlformats.org/drawingml/2006/main" xmlns:r="http://schemas.openxmlformats.org/officeDocument/2006/relationships" xmlns:p="http://schemas.openxmlformats.org/presentationml/2006/main">
   <p:cSld name="Slide 13">
     <p:bg>
@@ -14254,7 +15328,7 @@
 </p:sld>
 </file>
 
-<file path=ppt/slides/slide27.xml><?xml version="1.0" encoding="utf-8"?>
+<file path=ppt/slides/slide29.xml><?xml version="1.0" encoding="utf-8"?>
 <p:sld xmlns:a="http://schemas.openxmlformats.org/drawingml/2006/main" xmlns:r="http://schemas.openxmlformats.org/officeDocument/2006/relationships" xmlns:p="http://schemas.openxmlformats.org/presentationml/2006/main">
   <p:cSld name="Slide 15">
     <p:bg>
